--- a/ReservaUNAB_Presentacion.pptx
+++ b/ReservaUNAB_Presentacion.pptx
@@ -4,6 +4,9 @@
   <p:sldMasterIdLst>
     <p:sldMasterId id="2147483648" r:id="rId1"/>
   </p:sldMasterIdLst>
+  <p:notesMasterIdLst>
+    <p:notesMasterId r:id="rId9"/>
+  </p:notesMasterIdLst>
   <p:sldIdLst>
     <p:sldId id="256" r:id="rId2"/>
     <p:sldId id="257" r:id="rId3"/>
@@ -11,14 +14,9 @@
     <p:sldId id="259" r:id="rId5"/>
     <p:sldId id="260" r:id="rId6"/>
     <p:sldId id="261" r:id="rId7"/>
-    <p:sldId id="262" r:id="rId8"/>
-    <p:sldId id="263" r:id="rId9"/>
-    <p:sldId id="264" r:id="rId10"/>
+    <p:sldId id="263" r:id="rId8"/>
   </p:sldIdLst>
-  <p:notesMasterIdLst>
-    <p:notesMasterId r:id="rId11"/>
-  </p:notesMasterIdLst>
-  <p:sldSz cx="9144000" cy="5143500"/>
+  <p:sldSz cx="9144000" cy="5143500" type="screen16x9"/>
   <p:notesSz cx="5143500" cy="9144000"/>
   <p:defaultTextStyle>
     <a:lvl1pPr marL="0" algn="l" defTabSz="914400" rtl="0" eaLnBrk="1" latinLnBrk="0" hangingPunct="1">
@@ -112,6 +110,11 @@
       </a:defRPr>
     </a:lvl9pPr>
   </p:defaultTextStyle>
+  <p:extLst>
+    <p:ext uri="{EFAFB233-063F-42B5-8137-9DF3F51BA10A}">
+      <p15:sldGuideLst xmlns:p15="http://schemas.microsoft.com/office/powerpoint/2012/main"/>
+    </p:ext>
+  </p:extLst>
 </p:presentation>
 </file>
 
@@ -137,234 +140,10 @@
           <a:chExt cx="0" cy="0"/>
         </a:xfrm>
       </p:grpSpPr>
-      <p:sp>
-        <p:nvSpPr>
-          <p:cNvPr id="2" name="Header Placeholder 1"/>
-          <p:cNvSpPr>
-            <a:spLocks noGrp="1"/>
-          </p:cNvSpPr>
-          <p:nvPr>
-            <p:ph type="hdr" sz="quarter"/>
-          </p:nvPr>
-        </p:nvSpPr>
-        <p:spPr>
-          <a:xfrm>
-            <a:off x="0" y="0"/>
-            <a:ext cx="2971800" cy="458788"/>
-          </a:xfrm>
-          <a:prstGeom prst="rect">
-            <a:avLst/>
-          </a:prstGeom>
-        </p:spPr>
-        <p:txBody>
-          <a:bodyPr vert="horz" lIns="91440" tIns="45720" rIns="91440" bIns="45720" rtlCol="0"/>
-          <a:lstStyle>
-            <a:lvl1pPr algn="l">
-              <a:defRPr sz="1200"/>
-            </a:lvl1pPr>
-          </a:lstStyle>
-          <a:p>
-            <a:endParaRPr lang="en-US"/>
-          </a:p>
-        </p:txBody>
-      </p:sp>
-      <p:sp>
-        <p:nvSpPr>
-          <p:cNvPr id="3" name="Date Placeholder 2"/>
-          <p:cNvSpPr>
-            <a:spLocks noGrp="1"/>
-          </p:cNvSpPr>
-          <p:nvPr>
-            <p:ph type="dt" idx="1"/>
-          </p:nvPr>
-        </p:nvSpPr>
-        <p:spPr>
-          <a:xfrm>
-            <a:off x="3884613" y="0"/>
-            <a:ext cx="2971800" cy="458788"/>
-          </a:xfrm>
-          <a:prstGeom prst="rect">
-            <a:avLst/>
-          </a:prstGeom>
-        </p:spPr>
-        <p:txBody>
-          <a:bodyPr vert="horz" lIns="91440" tIns="45720" rIns="91440" bIns="45720" rtlCol="0"/>
-          <a:lstStyle>
-            <a:lvl1pPr algn="r">
-              <a:defRPr sz="1200"/>
-            </a:lvl1pPr>
-          </a:lstStyle>
-          <a:p>
-            <a:fld id="{5282F153-3F37-0F45-9E97-73ACFA13230C}" type="datetimeFigureOut">
-              <a:rPr lang="en-US"/>
-              <a:t>7/23/19</a:t>
-            </a:fld>
-            <a:endParaRPr lang="en-US"/>
-          </a:p>
-        </p:txBody>
-      </p:sp>
-      <p:sp>
-        <p:nvSpPr>
-          <p:cNvPr id="4" name="Slide Image Placeholder 3"/>
-          <p:cNvSpPr>
-            <a:spLocks noGrp="1" noRot="1" noChangeAspect="1"/>
-          </p:cNvSpPr>
-          <p:nvPr>
-            <p:ph type="sldImg" idx="2"/>
-          </p:nvPr>
-        </p:nvSpPr>
-        <p:spPr>
-          <a:xfrm>
-            <a:off x="685800" y="1143000"/>
-            <a:ext cx="5486400" cy="3086100"/>
-          </a:xfrm>
-          <a:prstGeom prst="rect">
-            <a:avLst/>
-          </a:prstGeom>
-          <a:noFill/>
-          <a:ln w="12700">
-            <a:solidFill>
-              <a:prstClr val="black"/>
-            </a:solidFill>
-          </a:ln>
-        </p:spPr>
-        <p:txBody>
-          <a:bodyPr vert="horz" lIns="91440" tIns="45720" rIns="91440" bIns="45720" rtlCol="0" anchor="ctr"/>
-          <a:lstStyle/>
-          <a:p>
-            <a:endParaRPr lang="en-US"/>
-          </a:p>
-        </p:txBody>
-      </p:sp>
-      <p:sp>
-        <p:nvSpPr>
-          <p:cNvPr id="5" name="Notes Placeholder 4"/>
-          <p:cNvSpPr>
-            <a:spLocks noGrp="1"/>
-          </p:cNvSpPr>
-          <p:nvPr>
-            <p:ph type="body" sz="quarter" idx="3"/>
-          </p:nvPr>
-        </p:nvSpPr>
-        <p:spPr>
-          <a:xfrm>
-            <a:off x="685800" y="4400550"/>
-            <a:ext cx="5486400" cy="3600450"/>
-          </a:xfrm>
-          <a:prstGeom prst="rect">
-            <a:avLst/>
-          </a:prstGeom>
-        </p:spPr>
-        <p:txBody>
-          <a:bodyPr vert="horz" lIns="91440" tIns="45720" rIns="91440" bIns="45720" rtlCol="0"/>
-          <a:lstStyle/>
-          <a:p>
-            <a:pPr lvl="0"/>
-            <a:r>
-              <a:rPr lang="en-US"/>
-              <a:t>Click to edit Master text styles</a:t>
-            </a:r>
-          </a:p>
-          <a:p>
-            <a:pPr lvl="1"/>
-            <a:r>
-              <a:rPr lang="en-US"/>
-              <a:t>Second level</a:t>
-            </a:r>
-          </a:p>
-          <a:p>
-            <a:pPr lvl="2"/>
-            <a:r>
-              <a:rPr lang="en-US"/>
-              <a:t>Third level</a:t>
-            </a:r>
-          </a:p>
-          <a:p>
-            <a:pPr lvl="3"/>
-            <a:r>
-              <a:rPr lang="en-US"/>
-              <a:t>Fourth level</a:t>
-            </a:r>
-          </a:p>
-          <a:p>
-            <a:pPr lvl="4"/>
-            <a:r>
-              <a:rPr lang="en-US"/>
-              <a:t>Fifth level</a:t>
-            </a:r>
-          </a:p>
-        </p:txBody>
-      </p:sp>
-      <p:sp>
-        <p:nvSpPr>
-          <p:cNvPr id="6" name="Footer Placeholder 5"/>
-          <p:cNvSpPr>
-            <a:spLocks noGrp="1"/>
-          </p:cNvSpPr>
-          <p:nvPr>
-            <p:ph type="ftr" sz="quarter" idx="4"/>
-          </p:nvPr>
-        </p:nvSpPr>
-        <p:spPr>
-          <a:xfrm>
-            <a:off x="0" y="8685213"/>
-            <a:ext cx="2971800" cy="458787"/>
-          </a:xfrm>
-          <a:prstGeom prst="rect">
-            <a:avLst/>
-          </a:prstGeom>
-        </p:spPr>
-        <p:txBody>
-          <a:bodyPr vert="horz" lIns="91440" tIns="45720" rIns="91440" bIns="45720" rtlCol="0" anchor="b"/>
-          <a:lstStyle>
-            <a:lvl1pPr algn="l">
-              <a:defRPr sz="1200"/>
-            </a:lvl1pPr>
-          </a:lstStyle>
-          <a:p>
-            <a:endParaRPr lang="en-US"/>
-          </a:p>
-        </p:txBody>
-      </p:sp>
-      <p:sp>
-        <p:nvSpPr>
-          <p:cNvPr id="7" name="Slide Number Placeholder 6"/>
-          <p:cNvSpPr>
-            <a:spLocks noGrp="1"/>
-          </p:cNvSpPr>
-          <p:nvPr>
-            <p:ph type="sldNum" sz="quarter" idx="5"/>
-          </p:nvPr>
-        </p:nvSpPr>
-        <p:spPr>
-          <a:xfrm>
-            <a:off x="3884613" y="8685213"/>
-            <a:ext cx="2971800" cy="458787"/>
-          </a:xfrm>
-          <a:prstGeom prst="rect">
-            <a:avLst/>
-          </a:prstGeom>
-        </p:spPr>
-        <p:txBody>
-          <a:bodyPr vert="horz" lIns="91440" tIns="45720" rIns="91440" bIns="45720" rtlCol="0" anchor="b"/>
-          <a:lstStyle>
-            <a:lvl1pPr algn="r">
-              <a:defRPr sz="1200"/>
-            </a:lvl1pPr>
-          </a:lstStyle>
-          <a:p>
-            <a:fld id="{CE5E9CC1-C706-0F49-92D6-E571CC5EEA8F}" type="slidenum">
-              <a:rPr lang="en-US"/>
-              <a:t>‹#›</a:t>
-            </a:fld>
-            <a:endParaRPr lang="en-US"/>
-          </a:p>
-        </p:txBody>
-      </p:sp>
     </p:spTree>
     <p:extLst>
       <p:ext uri="{BB962C8B-B14F-4D97-AF65-F5344CB8AC3E}">
-        <p14:creationId xmlns:p14="http://schemas.microsoft.com/office/powerpoint/2010/main" val="1024086991"/>
+        <p14:creationId xmlns:p14="http://schemas.microsoft.com/office/powerpoint/2010/main" val="1170639605"/>
       </p:ext>
     </p:extLst>
   </p:cSld>
@@ -508,10 +287,6 @@
           <a:bodyPr/>
           <a:lstStyle/>
           <a:p>
-            <a:r>
-              <a:rPr lang="en-US" dirty="0"/>
-              <a:t/>
-            </a:r>
             <a:endParaRPr lang="en-US" dirty="0"/>
           </a:p>
         </p:txBody>
@@ -596,10 +371,6 @@
           <a:bodyPr/>
           <a:lstStyle/>
           <a:p>
-            <a:r>
-              <a:rPr lang="en-US" dirty="0"/>
-              <a:t/>
-            </a:r>
             <a:endParaRPr lang="en-US" dirty="0"/>
           </a:p>
         </p:txBody>
@@ -684,10 +455,6 @@
           <a:bodyPr/>
           <a:lstStyle/>
           <a:p>
-            <a:r>
-              <a:rPr lang="en-US" dirty="0"/>
-              <a:t/>
-            </a:r>
             <a:endParaRPr lang="en-US" dirty="0"/>
           </a:p>
         </p:txBody>
@@ -772,10 +539,6 @@
           <a:bodyPr/>
           <a:lstStyle/>
           <a:p>
-            <a:r>
-              <a:rPr lang="en-US" dirty="0"/>
-              <a:t/>
-            </a:r>
             <a:endParaRPr lang="en-US" dirty="0"/>
           </a:p>
         </p:txBody>
@@ -860,10 +623,6 @@
           <a:bodyPr/>
           <a:lstStyle/>
           <a:p>
-            <a:r>
-              <a:rPr lang="en-US" dirty="0"/>
-              <a:t/>
-            </a:r>
             <a:endParaRPr lang="en-US" dirty="0"/>
           </a:p>
         </p:txBody>
@@ -948,10 +707,6 @@
           <a:bodyPr/>
           <a:lstStyle/>
           <a:p>
-            <a:r>
-              <a:rPr lang="en-US" dirty="0"/>
-              <a:t/>
-            </a:r>
             <a:endParaRPr lang="en-US" dirty="0"/>
           </a:p>
         </p:txBody>
@@ -1036,10 +791,6 @@
           <a:bodyPr/>
           <a:lstStyle/>
           <a:p>
-            <a:r>
-              <a:rPr lang="en-US" dirty="0"/>
-              <a:t/>
-            </a:r>
             <a:endParaRPr lang="en-US" dirty="0"/>
           </a:p>
         </p:txBody>
@@ -1062,182 +813,6 @@
             <a:fld id="{F7021451-1387-4CA6-816F-3879F97B5CBC}" type="slidenum">
               <a:rPr lang="en-US"/>
               <a:t>7</a:t>
-            </a:fld>
-            <a:endParaRPr lang="en-US"/>
-          </a:p>
-        </p:txBody>
-      </p:sp>
-    </p:spTree>
-    <p:extLst>
-      <p:ext uri="{BB962C8B-B14F-4D97-AF65-F5344CB8AC3E}">
-        <p14:creationId xmlns:p14="http://schemas.microsoft.com/office/powerpoint/2010/main" val="1024086991"/>
-      </p:ext>
-    </p:extLst>
-  </p:cSld>
-  <p:clrMapOvr>
-    <a:masterClrMapping/>
-  </p:clrMapOvr>
-</p:notes>
-</file>
-
-<file path=ppt/notesSlides/notesSlide8.xml><?xml version="1.0" encoding="utf-8"?>
-<p:notes xmlns:a="http://schemas.openxmlformats.org/drawingml/2006/main" xmlns:r="http://schemas.openxmlformats.org/officeDocument/2006/relationships" xmlns:p="http://schemas.openxmlformats.org/presentationml/2006/main">
-  <p:cSld>
-    <p:spTree>
-      <p:nvGrpSpPr>
-        <p:cNvPr id="1" name=""/>
-        <p:cNvGrpSpPr/>
-        <p:nvPr/>
-      </p:nvGrpSpPr>
-      <p:grpSpPr>
-        <a:xfrm>
-          <a:off x="0" y="0"/>
-          <a:ext cx="0" cy="0"/>
-          <a:chOff x="0" y="0"/>
-          <a:chExt cx="0" cy="0"/>
-        </a:xfrm>
-      </p:grpSpPr>
-      <p:sp>
-        <p:nvSpPr>
-          <p:cNvPr id="2" name="Slide Image Placeholder 1"/>
-          <p:cNvSpPr>
-            <a:spLocks noGrp="1" noRot="1" noChangeAspect="1"/>
-          </p:cNvSpPr>
-          <p:nvPr>
-            <p:ph type="sldImg"/>
-          </p:nvPr>
-        </p:nvSpPr>
-        <p:spPr/>
-      </p:sp>
-      <p:sp>
-        <p:nvSpPr>
-          <p:cNvPr id="3" name="Notes Placeholder 2"/>
-          <p:cNvSpPr>
-            <a:spLocks noGrp="1"/>
-          </p:cNvSpPr>
-          <p:nvPr>
-            <p:ph type="body" idx="1"/>
-          </p:nvPr>
-        </p:nvSpPr>
-        <p:spPr/>
-        <p:txBody>
-          <a:bodyPr/>
-          <a:lstStyle/>
-          <a:p>
-            <a:r>
-              <a:rPr lang="en-US" dirty="0"/>
-              <a:t/>
-            </a:r>
-            <a:endParaRPr lang="en-US" dirty="0"/>
-          </a:p>
-        </p:txBody>
-      </p:sp>
-      <p:sp>
-        <p:nvSpPr>
-          <p:cNvPr id="4" name="Slide Number Placeholder 3"/>
-          <p:cNvSpPr>
-            <a:spLocks noGrp="1"/>
-          </p:cNvSpPr>
-          <p:nvPr>
-            <p:ph type="sldNum" sz="quarter" idx="10"/>
-          </p:nvPr>
-        </p:nvSpPr>
-        <p:spPr/>
-        <p:txBody>
-          <a:bodyPr/>
-          <a:lstStyle/>
-          <a:p>
-            <a:fld id="{F7021451-1387-4CA6-816F-3879F97B5CBC}" type="slidenum">
-              <a:rPr lang="en-US"/>
-              <a:t>8</a:t>
-            </a:fld>
-            <a:endParaRPr lang="en-US"/>
-          </a:p>
-        </p:txBody>
-      </p:sp>
-    </p:spTree>
-    <p:extLst>
-      <p:ext uri="{BB962C8B-B14F-4D97-AF65-F5344CB8AC3E}">
-        <p14:creationId xmlns:p14="http://schemas.microsoft.com/office/powerpoint/2010/main" val="1024086991"/>
-      </p:ext>
-    </p:extLst>
-  </p:cSld>
-  <p:clrMapOvr>
-    <a:masterClrMapping/>
-  </p:clrMapOvr>
-</p:notes>
-</file>
-
-<file path=ppt/notesSlides/notesSlide9.xml><?xml version="1.0" encoding="utf-8"?>
-<p:notes xmlns:a="http://schemas.openxmlformats.org/drawingml/2006/main" xmlns:r="http://schemas.openxmlformats.org/officeDocument/2006/relationships" xmlns:p="http://schemas.openxmlformats.org/presentationml/2006/main">
-  <p:cSld>
-    <p:spTree>
-      <p:nvGrpSpPr>
-        <p:cNvPr id="1" name=""/>
-        <p:cNvGrpSpPr/>
-        <p:nvPr/>
-      </p:nvGrpSpPr>
-      <p:grpSpPr>
-        <a:xfrm>
-          <a:off x="0" y="0"/>
-          <a:ext cx="0" cy="0"/>
-          <a:chOff x="0" y="0"/>
-          <a:chExt cx="0" cy="0"/>
-        </a:xfrm>
-      </p:grpSpPr>
-      <p:sp>
-        <p:nvSpPr>
-          <p:cNvPr id="2" name="Slide Image Placeholder 1"/>
-          <p:cNvSpPr>
-            <a:spLocks noGrp="1" noRot="1" noChangeAspect="1"/>
-          </p:cNvSpPr>
-          <p:nvPr>
-            <p:ph type="sldImg"/>
-          </p:nvPr>
-        </p:nvSpPr>
-        <p:spPr/>
-      </p:sp>
-      <p:sp>
-        <p:nvSpPr>
-          <p:cNvPr id="3" name="Notes Placeholder 2"/>
-          <p:cNvSpPr>
-            <a:spLocks noGrp="1"/>
-          </p:cNvSpPr>
-          <p:nvPr>
-            <p:ph type="body" idx="1"/>
-          </p:nvPr>
-        </p:nvSpPr>
-        <p:spPr/>
-        <p:txBody>
-          <a:bodyPr/>
-          <a:lstStyle/>
-          <a:p>
-            <a:r>
-              <a:rPr lang="en-US" dirty="0"/>
-              <a:t/>
-            </a:r>
-            <a:endParaRPr lang="en-US" dirty="0"/>
-          </a:p>
-        </p:txBody>
-      </p:sp>
-      <p:sp>
-        <p:nvSpPr>
-          <p:cNvPr id="4" name="Slide Number Placeholder 3"/>
-          <p:cNvSpPr>
-            <a:spLocks noGrp="1"/>
-          </p:cNvSpPr>
-          <p:nvPr>
-            <p:ph type="sldNum" sz="quarter" idx="10"/>
-          </p:nvPr>
-        </p:nvSpPr>
-        <p:spPr/>
-        <p:txBody>
-          <a:bodyPr/>
-          <a:lstStyle/>
-          <a:p>
-            <a:fld id="{F7021451-1387-4CA6-816F-3879F97B5CBC}" type="slidenum">
-              <a:rPr lang="en-US"/>
-              <a:t>9</a:t>
             </a:fld>
             <a:endParaRPr lang="en-US"/>
           </a:p>
@@ -1289,6 +864,11 @@
 <file path=ppt/slideMasters/slideMaster1.xml><?xml version="1.0" encoding="utf-8"?>
 <p:sldMaster xmlns:a="http://schemas.openxmlformats.org/drawingml/2006/main" xmlns:r="http://schemas.openxmlformats.org/officeDocument/2006/relationships" xmlns:p="http://schemas.openxmlformats.org/presentationml/2006/main">
   <p:cSld>
+    <p:bg>
+      <p:bgRef idx="1001">
+        <a:schemeClr val="bg1"/>
+      </p:bgRef>
+    </p:bg>
     <p:spTree>
       <p:nvGrpSpPr>
         <p:cNvPr id="1" name=""/>
@@ -1571,6 +1151,7 @@
         <a:solidFill>
           <a:srgbClr val="7A1128"/>
         </a:solidFill>
+        <a:effectLst/>
       </p:bgPr>
     </p:bg>
     <p:spTree>
@@ -1608,7 +1189,7 @@
           <a:bodyPr wrap="square" rtlCol="0" anchor="ctr"/>
           <a:lstStyle/>
           <a:p>
-            <a:pPr algn="ctr" indent="0" marL="0">
+            <a:pPr marL="0" indent="0" algn="ctr">
               <a:buNone/>
             </a:pPr>
             <a:r>
@@ -1647,7 +1228,7 @@
           <a:bodyPr wrap="square" rtlCol="0" anchor="ctr"/>
           <a:lstStyle/>
           <a:p>
-            <a:pPr algn="ctr" indent="0" marL="0">
+            <a:pPr marL="0" indent="0" algn="ctr">
               <a:buNone/>
             </a:pPr>
             <a:r>
@@ -1686,7 +1267,7 @@
           <a:bodyPr wrap="square" rtlCol="0" anchor="ctr"/>
           <a:lstStyle/>
           <a:p>
-            <a:pPr algn="ctr" indent="0" marL="0">
+            <a:pPr marL="0" indent="0" algn="ctr">
               <a:buNone/>
             </a:pPr>
             <a:r>
@@ -1720,6 +1301,7 @@
         <a:solidFill>
           <a:srgbClr val="FFFFFF"/>
         </a:solidFill>
+        <a:effectLst/>
       </p:bgPr>
     </p:bg>
     <p:spTree>
@@ -1757,7 +1339,7 @@
           <a:bodyPr wrap="square" rtlCol="0" anchor="ctr"/>
           <a:lstStyle/>
           <a:p>
-            <a:pPr indent="0" marL="0">
+            <a:pPr marL="0" indent="0">
               <a:buNone/>
             </a:pPr>
             <a:r>
@@ -1803,7 +1385,7 @@
         </p:nvSpPr>
         <p:spPr>
           <a:xfrm>
-            <a:off x="914400" y="1371600"/>
+            <a:off x="685800" y="2366010"/>
             <a:ext cx="7772400" cy="411480"/>
           </a:xfrm>
           <a:prstGeom prst="rect">
@@ -1816,176 +1398,15 @@
           <a:bodyPr wrap="square" rtlCol="0" anchor="ctr"/>
           <a:lstStyle/>
           <a:p>
-            <a:pPr algn="l" indent="0" marL="0">
-              <a:buNone/>
-            </a:pPr>
-            <a:r>
-              <a:rPr lang="en-US" sz="1400" dirty="0">
-                <a:solidFill>
-                  <a:srgbClr val="2B2B2B"/>
-                </a:solidFill>
-                <a:latin typeface="Segoe UI" pitchFamily="34" charset="0"/>
-                <a:ea typeface="Segoe UI" pitchFamily="34" charset="-122"/>
-                <a:cs typeface="Segoe UI" pitchFamily="34" charset="-120"/>
-              </a:rPr>
-              <a:t>❌ No hay un sistema centralizado para reservar espacios</a:t>
-            </a:r>
-            <a:endParaRPr lang="en-US" sz="1400" dirty="0"/>
-          </a:p>
-        </p:txBody>
-      </p:sp>
-      <p:sp>
-        <p:nvSpPr>
-          <p:cNvPr id="5" name="Text 3"/>
-          <p:cNvSpPr txBox="1"/>
-          <p:nvPr/>
-        </p:nvSpPr>
-        <p:spPr>
-          <a:xfrm>
-            <a:off x="914400" y="1965960"/>
-            <a:ext cx="7772400" cy="411480"/>
-          </a:xfrm>
-          <a:prstGeom prst="rect">
-            <a:avLst/>
-          </a:prstGeom>
-          <a:noFill/>
-          <a:ln/>
-        </p:spPr>
-        <p:txBody>
-          <a:bodyPr wrap="square" rtlCol="0" anchor="ctr"/>
-          <a:lstStyle/>
-          <a:p>
-            <a:pPr algn="l" indent="0" marL="0">
-              <a:buNone/>
-            </a:pPr>
-            <a:r>
-              <a:rPr lang="en-US" sz="1400" dirty="0">
-                <a:solidFill>
-                  <a:srgbClr val="2B2B2B"/>
-                </a:solidFill>
-                <a:latin typeface="Segoe UI" pitchFamily="34" charset="0"/>
-                <a:ea typeface="Segoe UI" pitchFamily="34" charset="-122"/>
-                <a:cs typeface="Segoe UI" pitchFamily="34" charset="-120"/>
-              </a:rPr>
-              <a:t>❌ Dificultad para ver la disponibilidad en tiempo real</a:t>
-            </a:r>
-            <a:endParaRPr lang="en-US" sz="1400" dirty="0"/>
-          </a:p>
-        </p:txBody>
-      </p:sp>
-      <p:sp>
-        <p:nvSpPr>
-          <p:cNvPr id="6" name="Text 4"/>
-          <p:cNvSpPr txBox="1"/>
-          <p:nvPr/>
-        </p:nvSpPr>
-        <p:spPr>
-          <a:xfrm>
-            <a:off x="914400" y="2560320"/>
-            <a:ext cx="7772400" cy="411480"/>
-          </a:xfrm>
-          <a:prstGeom prst="rect">
-            <a:avLst/>
-          </a:prstGeom>
-          <a:noFill/>
-          <a:ln/>
-        </p:spPr>
-        <p:txBody>
-          <a:bodyPr wrap="square" rtlCol="0" anchor="ctr"/>
-          <a:lstStyle/>
-          <a:p>
-            <a:pPr algn="l" indent="0" marL="0">
-              <a:buNone/>
-            </a:pPr>
-            <a:r>
-              <a:rPr lang="en-US" sz="1400" dirty="0">
-                <a:solidFill>
-                  <a:srgbClr val="2B2B2B"/>
-                </a:solidFill>
-                <a:latin typeface="Segoe UI" pitchFamily="34" charset="0"/>
-                <a:ea typeface="Segoe UI" pitchFamily="34" charset="-122"/>
-                <a:cs typeface="Segoe UI" pitchFamily="34" charset="-120"/>
-              </a:rPr>
-              <a:t>❌ Proceso manual y confuso para estudiantes y docentes</a:t>
-            </a:r>
-            <a:endParaRPr lang="en-US" sz="1400" dirty="0"/>
-          </a:p>
-        </p:txBody>
-      </p:sp>
-      <p:sp>
-        <p:nvSpPr>
-          <p:cNvPr id="7" name="Text 5"/>
-          <p:cNvSpPr txBox="1"/>
-          <p:nvPr/>
-        </p:nvSpPr>
-        <p:spPr>
-          <a:xfrm>
-            <a:off x="914400" y="3154680"/>
-            <a:ext cx="7772400" cy="411480"/>
-          </a:xfrm>
-          <a:prstGeom prst="rect">
-            <a:avLst/>
-          </a:prstGeom>
-          <a:noFill/>
-          <a:ln/>
-        </p:spPr>
-        <p:txBody>
-          <a:bodyPr wrap="square" rtlCol="0" anchor="ctr"/>
-          <a:lstStyle/>
-          <a:p>
-            <a:pPr algn="l" indent="0" marL="0">
-              <a:buNone/>
-            </a:pPr>
-            <a:r>
-              <a:rPr lang="en-US" sz="1400" dirty="0">
-                <a:solidFill>
-                  <a:srgbClr val="2B2B2B"/>
-                </a:solidFill>
-                <a:latin typeface="Segoe UI" pitchFamily="34" charset="0"/>
-                <a:ea typeface="Segoe UI" pitchFamily="34" charset="-122"/>
-                <a:cs typeface="Segoe UI" pitchFamily="34" charset="-120"/>
-              </a:rPr>
-              <a:t>❌ Falta de filtros para buscar por tipo, capacidad o edificio</a:t>
-            </a:r>
-            <a:endParaRPr lang="en-US" sz="1400" dirty="0"/>
-          </a:p>
-        </p:txBody>
-      </p:sp>
-      <p:sp>
-        <p:nvSpPr>
-          <p:cNvPr id="8" name="Text 6"/>
-          <p:cNvSpPr txBox="1"/>
-          <p:nvPr/>
-        </p:nvSpPr>
-        <p:spPr>
-          <a:xfrm>
-            <a:off x="914400" y="3749040"/>
-            <a:ext cx="7772400" cy="411480"/>
-          </a:xfrm>
-          <a:prstGeom prst="rect">
-            <a:avLst/>
-          </a:prstGeom>
-          <a:noFill/>
-          <a:ln/>
-        </p:spPr>
-        <p:txBody>
-          <a:bodyPr wrap="square" rtlCol="0" anchor="ctr"/>
-          <a:lstStyle/>
-          <a:p>
-            <a:pPr algn="l" indent="0" marL="0">
-              <a:buNone/>
-            </a:pPr>
-            <a:r>
-              <a:rPr lang="en-US" sz="1400" dirty="0">
-                <a:solidFill>
-                  <a:srgbClr val="2B2B2B"/>
-                </a:solidFill>
-                <a:latin typeface="Segoe UI" pitchFamily="34" charset="0"/>
-                <a:ea typeface="Segoe UI" pitchFamily="34" charset="-122"/>
-                <a:cs typeface="Segoe UI" pitchFamily="34" charset="-120"/>
-              </a:rPr>
-              <a:t>❌ Sin historial de reservas ni gestión centralizada</a:t>
-            </a:r>
+            <a:r>
+              <a:rPr lang="es-CL" sz="1400" dirty="0"/>
+              <a:t>La Universidad Andrés Bello enfrenta una deficiencia crítica en la gestión de reserva de espacios académicos. Actualmente, no existe un sistema centralizado que permita a estudiantes y docentes consultar la disponibilidad de salas de forma eficiente y en tiempo real. El proceso es manual y confuso, generando conflictos de doble ocupación, pérdida de información y frustración en la comunidad universitaria. La falta de herramientas de búsqueda avanzada —como filtros por tipo de espacio, capacidad, edificio o fecha— obliga a los usuarios a recorrer manualmente listados completos, consumiendo tiempo valioso. Adicionalmente, no existe un historial centralizado de reservas que permita auditar, gestionar o cancelar reservaciones de forma organizada, lo que resulta en una experiencia deficiente y poco escalable para las necesidades actuales de la institución.</a:t>
+            </a:r>
+          </a:p>
+          <a:p>
+            <a:pPr marL="0" indent="0" algn="l">
+              <a:buNone/>
+            </a:pPr>
             <a:endParaRPr lang="en-US" sz="1400" dirty="0"/>
           </a:p>
         </p:txBody>
@@ -2006,6 +1427,7 @@
         <a:solidFill>
           <a:srgbClr val="FFFFFF"/>
         </a:solidFill>
+        <a:effectLst/>
       </p:bgPr>
     </p:bg>
     <p:spTree>
@@ -2043,7 +1465,7 @@
           <a:bodyPr wrap="square" rtlCol="0" anchor="ctr"/>
           <a:lstStyle/>
           <a:p>
-            <a:pPr indent="0" marL="0">
+            <a:pPr marL="0" indent="0">
               <a:buNone/>
             </a:pPr>
             <a:r>
@@ -2102,7 +1524,7 @@
           <a:bodyPr wrap="square" rtlCol="0" anchor="ctr"/>
           <a:lstStyle/>
           <a:p>
-            <a:pPr indent="0" marL="0">
+            <a:pPr marL="0" indent="0">
               <a:buNone/>
             </a:pPr>
             <a:r>
@@ -2141,7 +1563,7 @@
           <a:bodyPr wrap="square" rtlCol="0" anchor="ctr"/>
           <a:lstStyle/>
           <a:p>
-            <a:pPr indent="0" marL="0">
+            <a:pPr marL="0" indent="0">
               <a:buNone/>
             </a:pPr>
             <a:r>
@@ -2180,7 +1602,7 @@
           <a:bodyPr wrap="square" rtlCol="0" anchor="ctr"/>
           <a:lstStyle/>
           <a:p>
-            <a:pPr indent="0" marL="0">
+            <a:pPr marL="0" indent="0">
               <a:buNone/>
             </a:pPr>
             <a:r>
@@ -2219,7 +1641,7 @@
           <a:bodyPr wrap="square" rtlCol="0" anchor="ctr"/>
           <a:lstStyle/>
           <a:p>
-            <a:pPr indent="0" marL="0">
+            <a:pPr marL="0" indent="0">
               <a:buNone/>
             </a:pPr>
             <a:r>
@@ -2258,7 +1680,7 @@
           <a:bodyPr wrap="square" rtlCol="0" anchor="ctr"/>
           <a:lstStyle/>
           <a:p>
-            <a:pPr indent="0" marL="0">
+            <a:pPr marL="0" indent="0">
               <a:buNone/>
             </a:pPr>
             <a:r>
@@ -2297,7 +1719,7 @@
           <a:bodyPr wrap="square" rtlCol="0" anchor="ctr"/>
           <a:lstStyle/>
           <a:p>
-            <a:pPr indent="0" marL="0">
+            <a:pPr marL="0" indent="0">
               <a:buNone/>
             </a:pPr>
             <a:r>
@@ -2331,6 +1753,7 @@
         <a:solidFill>
           <a:srgbClr val="FFFFFF"/>
         </a:solidFill>
+        <a:effectLst/>
       </p:bgPr>
     </p:bg>
     <p:spTree>
@@ -2368,7 +1791,7 @@
           <a:bodyPr wrap="square" rtlCol="0" anchor="ctr"/>
           <a:lstStyle/>
           <a:p>
-            <a:pPr indent="0" marL="0">
+            <a:pPr marL="0" indent="0">
               <a:buNone/>
             </a:pPr>
             <a:r>
@@ -2427,7 +1850,7 @@
           <a:bodyPr wrap="square" rtlCol="0" anchor="ctr"/>
           <a:lstStyle/>
           <a:p>
-            <a:pPr indent="0" marL="0">
+            <a:pPr marL="0" indent="0">
               <a:buNone/>
             </a:pPr>
             <a:r>
@@ -2466,7 +1889,7 @@
           <a:bodyPr wrap="square" rtlCol="0" anchor="ctr"/>
           <a:lstStyle/>
           <a:p>
-            <a:pPr indent="0" marL="0">
+            <a:pPr marL="0" indent="0">
               <a:buNone/>
             </a:pPr>
             <a:r>
@@ -2505,7 +1928,7 @@
           <a:bodyPr wrap="square" rtlCol="0" anchor="ctr"/>
           <a:lstStyle/>
           <a:p>
-            <a:pPr indent="0" marL="0">
+            <a:pPr marL="0" indent="0">
               <a:buNone/>
             </a:pPr>
             <a:r>
@@ -2544,7 +1967,7 @@
           <a:bodyPr wrap="square" rtlCol="0" anchor="ctr"/>
           <a:lstStyle/>
           <a:p>
-            <a:pPr indent="0" marL="0">
+            <a:pPr marL="0" indent="0">
               <a:buNone/>
             </a:pPr>
             <a:r>
@@ -2583,7 +2006,7 @@
           <a:bodyPr wrap="square" rtlCol="0" anchor="ctr"/>
           <a:lstStyle/>
           <a:p>
-            <a:pPr indent="0" marL="0">
+            <a:pPr marL="0" indent="0">
               <a:buNone/>
             </a:pPr>
             <a:r>
@@ -2622,7 +2045,7 @@
           <a:bodyPr wrap="square" rtlCol="0" anchor="ctr"/>
           <a:lstStyle/>
           <a:p>
-            <a:pPr indent="0" marL="0">
+            <a:pPr marL="0" indent="0">
               <a:buNone/>
             </a:pPr>
             <a:r>
@@ -2661,7 +2084,7 @@
           <a:bodyPr wrap="square" rtlCol="0" anchor="ctr"/>
           <a:lstStyle/>
           <a:p>
-            <a:pPr indent="0" marL="0">
+            <a:pPr marL="0" indent="0">
               <a:buNone/>
             </a:pPr>
             <a:r>
@@ -2700,7 +2123,7 @@
           <a:bodyPr wrap="square" rtlCol="0" anchor="ctr"/>
           <a:lstStyle/>
           <a:p>
-            <a:pPr indent="0" marL="0">
+            <a:pPr marL="0" indent="0">
               <a:buNone/>
             </a:pPr>
             <a:r>
@@ -2739,7 +2162,7 @@
           <a:bodyPr wrap="square" rtlCol="0" anchor="ctr"/>
           <a:lstStyle/>
           <a:p>
-            <a:pPr indent="0" marL="0">
+            <a:pPr marL="0" indent="0">
               <a:buNone/>
             </a:pPr>
             <a:r>
@@ -2773,6 +2196,7 @@
         <a:solidFill>
           <a:srgbClr val="FFFFFF"/>
         </a:solidFill>
+        <a:effectLst/>
       </p:bgPr>
     </p:bg>
     <p:spTree>
@@ -2810,7 +2234,7 @@
           <a:bodyPr wrap="square" rtlCol="0" anchor="ctr"/>
           <a:lstStyle/>
           <a:p>
-            <a:pPr indent="0" marL="0">
+            <a:pPr marL="0" indent="0">
               <a:buNone/>
             </a:pPr>
             <a:r>
@@ -2856,7 +2280,7 @@
         </p:nvSpPr>
         <p:spPr>
           <a:xfrm>
-            <a:off x="640080" y="1371600"/>
+            <a:off x="335280" y="1371600"/>
             <a:ext cx="1737360" cy="2743200"/>
           </a:xfrm>
           <a:prstGeom prst="roundRect">
@@ -2881,7 +2305,7 @@
         </p:nvSpPr>
         <p:spPr>
           <a:xfrm>
-            <a:off x="640080" y="1645920"/>
+            <a:off x="335280" y="1645920"/>
             <a:ext cx="1737360" cy="365760"/>
           </a:xfrm>
           <a:prstGeom prst="rect">
@@ -2894,7 +2318,7 @@
           <a:bodyPr wrap="square" rtlCol="0" anchor="ctr"/>
           <a:lstStyle/>
           <a:p>
-            <a:pPr algn="ctr" indent="0" marL="0">
+            <a:pPr marL="0" indent="0" algn="ctr">
               <a:buNone/>
             </a:pPr>
             <a:r>
@@ -2920,7 +2344,7 @@
         </p:nvSpPr>
         <p:spPr>
           <a:xfrm>
-            <a:off x="777240" y="2194560"/>
+            <a:off x="472440" y="2194560"/>
             <a:ext cx="1463040" cy="457200"/>
           </a:xfrm>
           <a:prstGeom prst="rect">
@@ -2933,7 +2357,7 @@
           <a:bodyPr wrap="square" rtlCol="0" anchor="ctr"/>
           <a:lstStyle/>
           <a:p>
-            <a:pPr algn="ctr" indent="0" marL="0">
+            <a:pPr marL="0" indent="0" algn="ctr">
               <a:buNone/>
             </a:pPr>
             <a:r>
@@ -2959,7 +2383,7 @@
         </p:nvSpPr>
         <p:spPr>
           <a:xfrm>
-            <a:off x="777240" y="2743200"/>
+            <a:off x="472440" y="2743200"/>
             <a:ext cx="1463040" cy="457200"/>
           </a:xfrm>
           <a:prstGeom prst="rect">
@@ -2972,7 +2396,7 @@
           <a:bodyPr wrap="square" rtlCol="0" anchor="ctr"/>
           <a:lstStyle/>
           <a:p>
-            <a:pPr algn="ctr" indent="0" marL="0">
+            <a:pPr marL="0" indent="0" algn="ctr">
               <a:buNone/>
             </a:pPr>
             <a:r>
@@ -2998,7 +2422,7 @@
         </p:nvSpPr>
         <p:spPr>
           <a:xfrm>
-            <a:off x="2926080" y="1371600"/>
+            <a:off x="2537460" y="1371600"/>
             <a:ext cx="1737360" cy="2743200"/>
           </a:xfrm>
           <a:prstGeom prst="roundRect">
@@ -3023,7 +2447,7 @@
         </p:nvSpPr>
         <p:spPr>
           <a:xfrm>
-            <a:off x="2926080" y="1645920"/>
+            <a:off x="2537460" y="1645920"/>
             <a:ext cx="1737360" cy="365760"/>
           </a:xfrm>
           <a:prstGeom prst="rect">
@@ -3036,7 +2460,7 @@
           <a:bodyPr wrap="square" rtlCol="0" anchor="ctr"/>
           <a:lstStyle/>
           <a:p>
-            <a:pPr algn="ctr" indent="0" marL="0">
+            <a:pPr marL="0" indent="0" algn="ctr">
               <a:buNone/>
             </a:pPr>
             <a:r>
@@ -3062,7 +2486,7 @@
         </p:nvSpPr>
         <p:spPr>
           <a:xfrm>
-            <a:off x="3063240" y="2194560"/>
+            <a:off x="2674620" y="2194560"/>
             <a:ext cx="1463040" cy="457200"/>
           </a:xfrm>
           <a:prstGeom prst="rect">
@@ -3075,11 +2499,11 @@
           <a:bodyPr wrap="square" rtlCol="0" anchor="ctr"/>
           <a:lstStyle/>
           <a:p>
-            <a:pPr algn="ctr" indent="0" marL="0">
-              <a:buNone/>
-            </a:pPr>
-            <a:r>
-              <a:rPr lang="en-US" sz="1000" dirty="0">
+            <a:pPr marL="0" indent="0" algn="ctr">
+              <a:buNone/>
+            </a:pPr>
+            <a:r>
+              <a:rPr lang="en-US" sz="1000">
                 <a:solidFill>
                   <a:srgbClr val="2B2B2B"/>
                 </a:solidFill>
@@ -3087,9 +2511,31 @@
                 <a:ea typeface="Segoe UI" pitchFamily="34" charset="-122"/>
                 <a:cs typeface="Segoe UI" pitchFamily="34" charset="-120"/>
               </a:rPr>
-              <a:t>Responsive design</a:t>
-            </a:r>
-            <a:endParaRPr lang="en-US" sz="1000" dirty="0"/>
+              <a:t> </a:t>
+            </a:r>
+            <a:r>
+              <a:rPr lang="en-US" sz="1000" u="sng" dirty="0">
+                <a:solidFill>
+                  <a:srgbClr val="2B2B2B"/>
+                </a:solidFill>
+                <a:latin typeface="Segoe UI" pitchFamily="34" charset="0"/>
+                <a:ea typeface="Segoe UI" pitchFamily="34" charset="-122"/>
+                <a:cs typeface="Segoe UI" pitchFamily="34" charset="-120"/>
+              </a:rPr>
+              <a:t>D</a:t>
+            </a:r>
+            <a:r>
+              <a:rPr lang="en-US" sz="1000" u="sng">
+                <a:solidFill>
+                  <a:srgbClr val="2B2B2B"/>
+                </a:solidFill>
+                <a:latin typeface="Segoe UI" pitchFamily="34" charset="0"/>
+                <a:ea typeface="Segoe UI" pitchFamily="34" charset="-122"/>
+                <a:cs typeface="Segoe UI" pitchFamily="34" charset="-120"/>
+              </a:rPr>
+              <a:t>esign</a:t>
+            </a:r>
+            <a:endParaRPr lang="en-US" sz="1000" u="sng" dirty="0"/>
           </a:p>
         </p:txBody>
       </p:sp>
@@ -3101,7 +2547,7 @@
         </p:nvSpPr>
         <p:spPr>
           <a:xfrm>
-            <a:off x="3063240" y="2743200"/>
+            <a:off x="2674620" y="2743200"/>
             <a:ext cx="1463040" cy="457200"/>
           </a:xfrm>
           <a:prstGeom prst="rect">
@@ -3114,7 +2560,7 @@
           <a:bodyPr wrap="square" rtlCol="0" anchor="ctr"/>
           <a:lstStyle/>
           <a:p>
-            <a:pPr algn="ctr" indent="0" marL="0">
+            <a:pPr marL="0" indent="0" algn="ctr">
               <a:buNone/>
             </a:pPr>
             <a:r>
@@ -3140,7 +2586,7 @@
         </p:nvSpPr>
         <p:spPr>
           <a:xfrm>
-            <a:off x="5212080" y="1371600"/>
+            <a:off x="4739640" y="1416050"/>
             <a:ext cx="1737360" cy="2743200"/>
           </a:xfrm>
           <a:prstGeom prst="roundRect">
@@ -3165,7 +2611,7 @@
         </p:nvSpPr>
         <p:spPr>
           <a:xfrm>
-            <a:off x="5212080" y="1645920"/>
+            <a:off x="4739640" y="1690370"/>
             <a:ext cx="1737360" cy="365760"/>
           </a:xfrm>
           <a:prstGeom prst="rect">
@@ -3178,7 +2624,7 @@
           <a:bodyPr wrap="square" rtlCol="0" anchor="ctr"/>
           <a:lstStyle/>
           <a:p>
-            <a:pPr algn="ctr" indent="0" marL="0">
+            <a:pPr marL="0" indent="0" algn="ctr">
               <a:buNone/>
             </a:pPr>
             <a:r>
@@ -3204,7 +2650,7 @@
         </p:nvSpPr>
         <p:spPr>
           <a:xfrm>
-            <a:off x="5349240" y="2194560"/>
+            <a:off x="4876800" y="2239010"/>
             <a:ext cx="1463040" cy="457200"/>
           </a:xfrm>
           <a:prstGeom prst="rect">
@@ -3217,7 +2663,7 @@
           <a:bodyPr wrap="square" rtlCol="0" anchor="ctr"/>
           <a:lstStyle/>
           <a:p>
-            <a:pPr algn="ctr" indent="0" marL="0">
+            <a:pPr marL="0" indent="0" algn="ctr">
               <a:buNone/>
             </a:pPr>
             <a:r>
@@ -3243,7 +2689,7 @@
         </p:nvSpPr>
         <p:spPr>
           <a:xfrm>
-            <a:off x="5349240" y="2743200"/>
+            <a:off x="4876800" y="2787650"/>
             <a:ext cx="1463040" cy="457200"/>
           </a:xfrm>
           <a:prstGeom prst="rect">
@@ -3256,7 +2702,7 @@
           <a:bodyPr wrap="square" rtlCol="0" anchor="ctr"/>
           <a:lstStyle/>
           <a:p>
-            <a:pPr algn="ctr" indent="0" marL="0">
+            <a:pPr marL="0" indent="0" algn="ctr">
               <a:buNone/>
             </a:pPr>
             <a:r>
@@ -3282,7 +2728,7 @@
         </p:nvSpPr>
         <p:spPr>
           <a:xfrm>
-            <a:off x="7498080" y="1371600"/>
+            <a:off x="6934200" y="1416050"/>
             <a:ext cx="1737360" cy="2743200"/>
           </a:xfrm>
           <a:prstGeom prst="roundRect">
@@ -3307,7 +2753,7 @@
         </p:nvSpPr>
         <p:spPr>
           <a:xfrm>
-            <a:off x="7498080" y="1645920"/>
+            <a:off x="6934200" y="1690370"/>
             <a:ext cx="1737360" cy="365760"/>
           </a:xfrm>
           <a:prstGeom prst="rect">
@@ -3320,7 +2766,7 @@
           <a:bodyPr wrap="square" rtlCol="0" anchor="ctr"/>
           <a:lstStyle/>
           <a:p>
-            <a:pPr algn="ctr" indent="0" marL="0">
+            <a:pPr marL="0" indent="0" algn="ctr">
               <a:buNone/>
             </a:pPr>
             <a:r>
@@ -3346,7 +2792,7 @@
         </p:nvSpPr>
         <p:spPr>
           <a:xfrm>
-            <a:off x="7635240" y="2194560"/>
+            <a:off x="7071360" y="2239010"/>
             <a:ext cx="1463040" cy="457200"/>
           </a:xfrm>
           <a:prstGeom prst="rect">
@@ -3359,7 +2805,7 @@
           <a:bodyPr wrap="square" rtlCol="0" anchor="ctr"/>
           <a:lstStyle/>
           <a:p>
-            <a:pPr algn="ctr" indent="0" marL="0">
+            <a:pPr marL="0" indent="0" algn="ctr">
               <a:buNone/>
             </a:pPr>
             <a:r>
@@ -3385,7 +2831,7 @@
         </p:nvSpPr>
         <p:spPr>
           <a:xfrm>
-            <a:off x="7635240" y="2743200"/>
+            <a:off x="7071360" y="2787650"/>
             <a:ext cx="1463040" cy="457200"/>
           </a:xfrm>
           <a:prstGeom prst="rect">
@@ -3398,7 +2844,7 @@
           <a:bodyPr wrap="square" rtlCol="0" anchor="ctr"/>
           <a:lstStyle/>
           <a:p>
-            <a:pPr algn="ctr" indent="0" marL="0">
+            <a:pPr marL="0" indent="0" algn="ctr">
               <a:buNone/>
             </a:pPr>
             <a:r>
@@ -3432,6 +2878,7 @@
         <a:solidFill>
           <a:srgbClr val="FFFFFF"/>
         </a:solidFill>
+        <a:effectLst/>
       </p:bgPr>
     </p:bg>
     <p:spTree>
@@ -3469,7 +2916,7 @@
           <a:bodyPr wrap="square" rtlCol="0" anchor="ctr"/>
           <a:lstStyle/>
           <a:p>
-            <a:pPr indent="0" marL="0">
+            <a:pPr marL="0" indent="0">
               <a:buNone/>
             </a:pPr>
             <a:r>
@@ -3548,7 +2995,7 @@
           <a:bodyPr wrap="square" rtlCol="0" anchor="ctr"/>
           <a:lstStyle/>
           <a:p>
-            <a:pPr indent="0" marL="0">
+            <a:pPr marL="0" indent="0">
               <a:buNone/>
             </a:pPr>
             <a:r>
@@ -3587,7 +3034,7 @@
           <a:bodyPr wrap="square" rtlCol="0" anchor="ctr"/>
           <a:lstStyle/>
           <a:p>
-            <a:pPr indent="0" marL="0">
+            <a:pPr marL="0" indent="0">
               <a:buNone/>
             </a:pPr>
             <a:r>
@@ -3626,7 +3073,7 @@
           <a:bodyPr wrap="square" rtlCol="0" anchor="ctr"/>
           <a:lstStyle/>
           <a:p>
-            <a:pPr indent="0" marL="0">
+            <a:pPr marL="0" indent="0">
               <a:buNone/>
             </a:pPr>
             <a:r>
@@ -3665,7 +3112,7 @@
           <a:bodyPr wrap="square" rtlCol="0" anchor="ctr"/>
           <a:lstStyle/>
           <a:p>
-            <a:pPr indent="0" marL="0">
+            <a:pPr marL="0" indent="0">
               <a:buNone/>
             </a:pPr>
             <a:r>
@@ -3724,7 +3171,7 @@
           <a:bodyPr wrap="square" rtlCol="0" anchor="ctr"/>
           <a:lstStyle/>
           <a:p>
-            <a:pPr indent="0" marL="0">
+            <a:pPr marL="0" indent="0">
               <a:buNone/>
             </a:pPr>
             <a:r>
@@ -3763,7 +3210,7 @@
           <a:bodyPr wrap="square" rtlCol="0" anchor="ctr"/>
           <a:lstStyle/>
           <a:p>
-            <a:pPr indent="0" marL="0">
+            <a:pPr marL="0" indent="0">
               <a:buNone/>
             </a:pPr>
             <a:r>
@@ -3802,7 +3249,7 @@
           <a:bodyPr wrap="square" rtlCol="0" anchor="ctr"/>
           <a:lstStyle/>
           <a:p>
-            <a:pPr indent="0" marL="0">
+            <a:pPr marL="0" indent="0">
               <a:buNone/>
             </a:pPr>
             <a:r>
@@ -3841,7 +3288,7 @@
           <a:bodyPr wrap="square" rtlCol="0" anchor="ctr"/>
           <a:lstStyle/>
           <a:p>
-            <a:pPr indent="0" marL="0">
+            <a:pPr marL="0" indent="0">
               <a:buNone/>
             </a:pPr>
             <a:r>
@@ -3900,7 +3347,7 @@
           <a:bodyPr wrap="square" rtlCol="0" anchor="ctr"/>
           <a:lstStyle/>
           <a:p>
-            <a:pPr indent="0" marL="0">
+            <a:pPr marL="0" indent="0">
               <a:buNone/>
             </a:pPr>
             <a:r>
@@ -3939,7 +3386,7 @@
           <a:bodyPr wrap="square" rtlCol="0" anchor="ctr"/>
           <a:lstStyle/>
           <a:p>
-            <a:pPr indent="0" marL="0">
+            <a:pPr marL="0" indent="0">
               <a:buNone/>
             </a:pPr>
             <a:r>
@@ -3978,7 +3425,7 @@
           <a:bodyPr wrap="square" rtlCol="0" anchor="ctr"/>
           <a:lstStyle/>
           <a:p>
-            <a:pPr indent="0" marL="0">
+            <a:pPr marL="0" indent="0">
               <a:buNone/>
             </a:pPr>
             <a:r>
@@ -4017,7 +3464,7 @@
           <a:bodyPr wrap="square" rtlCol="0" anchor="ctr"/>
           <a:lstStyle/>
           <a:p>
-            <a:pPr indent="0" marL="0">
+            <a:pPr marL="0" indent="0">
               <a:buNone/>
             </a:pPr>
             <a:r>
@@ -4076,7 +3523,7 @@
           <a:bodyPr wrap="square" rtlCol="0" anchor="ctr"/>
           <a:lstStyle/>
           <a:p>
-            <a:pPr indent="0" marL="0">
+            <a:pPr marL="0" indent="0">
               <a:buNone/>
             </a:pPr>
             <a:r>
@@ -4115,7 +3562,7 @@
           <a:bodyPr wrap="square" rtlCol="0" anchor="ctr"/>
           <a:lstStyle/>
           <a:p>
-            <a:pPr indent="0" marL="0">
+            <a:pPr marL="0" indent="0">
               <a:buNone/>
             </a:pPr>
             <a:r>
@@ -4154,7 +3601,7 @@
           <a:bodyPr wrap="square" rtlCol="0" anchor="ctr"/>
           <a:lstStyle/>
           <a:p>
-            <a:pPr indent="0" marL="0">
+            <a:pPr marL="0" indent="0">
               <a:buNone/>
             </a:pPr>
             <a:r>
@@ -4193,7 +3640,7 @@
           <a:bodyPr wrap="square" rtlCol="0" anchor="ctr"/>
           <a:lstStyle/>
           <a:p>
-            <a:pPr indent="0" marL="0">
+            <a:pPr marL="0" indent="0">
               <a:buNone/>
             </a:pPr>
             <a:r>
@@ -4221,12 +3668,13 @@
 
 <file path=ppt/slides/slide7.xml><?xml version="1.0" encoding="utf-8"?>
 <p:sld xmlns:a="http://schemas.openxmlformats.org/drawingml/2006/main" xmlns:r="http://schemas.openxmlformats.org/officeDocument/2006/relationships" xmlns:p="http://schemas.openxmlformats.org/presentationml/2006/main">
-  <p:cSld name="Slide 7">
+  <p:cSld name="Slide 8">
     <p:bg>
       <p:bgPr>
         <a:solidFill>
-          <a:srgbClr val="7A1128"/>
+          <a:srgbClr val="FFFFFF"/>
         </a:solidFill>
+        <a:effectLst/>
       </p:bgPr>
     </p:bg>
     <p:spTree>
@@ -4251,469 +3699,6 @@
         </p:nvSpPr>
         <p:spPr>
           <a:xfrm>
-            <a:off x="457200" y="457200"/>
-            <a:ext cx="8229600" cy="548640"/>
-          </a:xfrm>
-          <a:prstGeom prst="rect">
-            <a:avLst/>
-          </a:prstGeom>
-          <a:noFill/>
-          <a:ln/>
-        </p:spPr>
-        <p:txBody>
-          <a:bodyPr wrap="square" rtlCol="0" anchor="ctr"/>
-          <a:lstStyle/>
-          <a:p>
-            <a:pPr algn="ctr" indent="0" marL="0">
-              <a:buNone/>
-            </a:pPr>
-            <a:r>
-              <a:rPr lang="en-US" sz="4000" b="1" dirty="0">
-                <a:solidFill>
-                  <a:srgbClr val="FFFFFF"/>
-                </a:solidFill>
-                <a:latin typeface="Segoe UI" pitchFamily="34" charset="0"/>
-                <a:ea typeface="Segoe UI" pitchFamily="34" charset="-122"/>
-                <a:cs typeface="Segoe UI" pitchFamily="34" charset="-120"/>
-              </a:rPr>
-              <a:t>Resultados</a:t>
-            </a:r>
-            <a:endParaRPr lang="en-US" sz="4000" dirty="0"/>
-          </a:p>
-        </p:txBody>
-      </p:sp>
-      <p:sp>
-        <p:nvSpPr>
-          <p:cNvPr id="3" name="Shape 1"/>
-          <p:cNvSpPr/>
-          <p:nvPr/>
-        </p:nvSpPr>
-        <p:spPr>
-          <a:xfrm>
-            <a:off x="640080" y="1645920"/>
-            <a:ext cx="1828800" cy="2286000"/>
-          </a:xfrm>
-          <a:prstGeom prst="roundRect">
-            <a:avLst/>
-          </a:prstGeom>
-          <a:solidFill>
-            <a:srgbClr val="F4E6C1"/>
-          </a:solidFill>
-          <a:ln/>
-        </p:spPr>
-      </p:sp>
-      <p:sp>
-        <p:nvSpPr>
-          <p:cNvPr id="4" name="Text 2"/>
-          <p:cNvSpPr txBox="1"/>
-          <p:nvPr/>
-        </p:nvSpPr>
-        <p:spPr>
-          <a:xfrm>
-            <a:off x="640080" y="2194560"/>
-            <a:ext cx="1828800" cy="640080"/>
-          </a:xfrm>
-          <a:prstGeom prst="rect">
-            <a:avLst/>
-          </a:prstGeom>
-          <a:noFill/>
-          <a:ln/>
-        </p:spPr>
-        <p:txBody>
-          <a:bodyPr wrap="square" rtlCol="0" anchor="ctr"/>
-          <a:lstStyle/>
-          <a:p>
-            <a:pPr algn="ctr" indent="0" marL="0">
-              <a:buNone/>
-            </a:pPr>
-            <a:r>
-              <a:rPr lang="en-US" sz="4400" b="1" dirty="0">
-                <a:solidFill>
-                  <a:srgbClr val="7A1128"/>
-                </a:solidFill>
-                <a:latin typeface="Segoe UI" pitchFamily="34" charset="0"/>
-                <a:ea typeface="Segoe UI" pitchFamily="34" charset="-122"/>
-                <a:cs typeface="Segoe UI" pitchFamily="34" charset="-120"/>
-              </a:rPr>
-              <a:t>19</a:t>
-            </a:r>
-            <a:endParaRPr lang="en-US" sz="4400" dirty="0"/>
-          </a:p>
-        </p:txBody>
-      </p:sp>
-      <p:sp>
-        <p:nvSpPr>
-          <p:cNvPr id="5" name="Text 3"/>
-          <p:cNvSpPr txBox="1"/>
-          <p:nvPr/>
-        </p:nvSpPr>
-        <p:spPr>
-          <a:xfrm>
-            <a:off x="640080" y="2926080"/>
-            <a:ext cx="1828800" cy="365760"/>
-          </a:xfrm>
-          <a:prstGeom prst="rect">
-            <a:avLst/>
-          </a:prstGeom>
-          <a:noFill/>
-          <a:ln/>
-        </p:spPr>
-        <p:txBody>
-          <a:bodyPr wrap="square" rtlCol="0" anchor="ctr"/>
-          <a:lstStyle/>
-          <a:p>
-            <a:pPr algn="ctr" indent="0" marL="0">
-              <a:buNone/>
-            </a:pPr>
-            <a:r>
-              <a:rPr lang="en-US" sz="1400" dirty="0">
-                <a:solidFill>
-                  <a:srgbClr val="7A1128"/>
-                </a:solidFill>
-                <a:latin typeface="Segoe UI" pitchFamily="34" charset="0"/>
-                <a:ea typeface="Segoe UI" pitchFamily="34" charset="-122"/>
-                <a:cs typeface="Segoe UI" pitchFamily="34" charset="-120"/>
-              </a:rPr>
-              <a:t>Espacios</a:t>
-            </a:r>
-            <a:endParaRPr lang="en-US" sz="1400" dirty="0"/>
-          </a:p>
-        </p:txBody>
-      </p:sp>
-      <p:sp>
-        <p:nvSpPr>
-          <p:cNvPr id="6" name="Shape 4"/>
-          <p:cNvSpPr/>
-          <p:nvPr/>
-        </p:nvSpPr>
-        <p:spPr>
-          <a:xfrm>
-            <a:off x="2697480" y="1645920"/>
-            <a:ext cx="1828800" cy="2286000"/>
-          </a:xfrm>
-          <a:prstGeom prst="roundRect">
-            <a:avLst/>
-          </a:prstGeom>
-          <a:solidFill>
-            <a:srgbClr val="F4E6C1"/>
-          </a:solidFill>
-          <a:ln/>
-        </p:spPr>
-      </p:sp>
-      <p:sp>
-        <p:nvSpPr>
-          <p:cNvPr id="7" name="Text 5"/>
-          <p:cNvSpPr txBox="1"/>
-          <p:nvPr/>
-        </p:nvSpPr>
-        <p:spPr>
-          <a:xfrm>
-            <a:off x="2697480" y="2194560"/>
-            <a:ext cx="1828800" cy="640080"/>
-          </a:xfrm>
-          <a:prstGeom prst="rect">
-            <a:avLst/>
-          </a:prstGeom>
-          <a:noFill/>
-          <a:ln/>
-        </p:spPr>
-        <p:txBody>
-          <a:bodyPr wrap="square" rtlCol="0" anchor="ctr"/>
-          <a:lstStyle/>
-          <a:p>
-            <a:pPr algn="ctr" indent="0" marL="0">
-              <a:buNone/>
-            </a:pPr>
-            <a:r>
-              <a:rPr lang="en-US" sz="4400" b="1" dirty="0">
-                <a:solidFill>
-                  <a:srgbClr val="7A1128"/>
-                </a:solidFill>
-                <a:latin typeface="Segoe UI" pitchFamily="34" charset="0"/>
-                <a:ea typeface="Segoe UI" pitchFamily="34" charset="-122"/>
-                <a:cs typeface="Segoe UI" pitchFamily="34" charset="-120"/>
-              </a:rPr>
-              <a:t>3</a:t>
-            </a:r>
-            <a:endParaRPr lang="en-US" sz="4400" dirty="0"/>
-          </a:p>
-        </p:txBody>
-      </p:sp>
-      <p:sp>
-        <p:nvSpPr>
-          <p:cNvPr id="8" name="Text 6"/>
-          <p:cNvSpPr txBox="1"/>
-          <p:nvPr/>
-        </p:nvSpPr>
-        <p:spPr>
-          <a:xfrm>
-            <a:off x="2697480" y="2926080"/>
-            <a:ext cx="1828800" cy="365760"/>
-          </a:xfrm>
-          <a:prstGeom prst="rect">
-            <a:avLst/>
-          </a:prstGeom>
-          <a:noFill/>
-          <a:ln/>
-        </p:spPr>
-        <p:txBody>
-          <a:bodyPr wrap="square" rtlCol="0" anchor="ctr"/>
-          <a:lstStyle/>
-          <a:p>
-            <a:pPr algn="ctr" indent="0" marL="0">
-              <a:buNone/>
-            </a:pPr>
-            <a:r>
-              <a:rPr lang="en-US" sz="1400" dirty="0">
-                <a:solidFill>
-                  <a:srgbClr val="7A1128"/>
-                </a:solidFill>
-                <a:latin typeface="Segoe UI" pitchFamily="34" charset="0"/>
-                <a:ea typeface="Segoe UI" pitchFamily="34" charset="-122"/>
-                <a:cs typeface="Segoe UI" pitchFamily="34" charset="-120"/>
-              </a:rPr>
-              <a:t>Edificios</a:t>
-            </a:r>
-            <a:endParaRPr lang="en-US" sz="1400" dirty="0"/>
-          </a:p>
-        </p:txBody>
-      </p:sp>
-      <p:sp>
-        <p:nvSpPr>
-          <p:cNvPr id="9" name="Shape 7"/>
-          <p:cNvSpPr/>
-          <p:nvPr/>
-        </p:nvSpPr>
-        <p:spPr>
-          <a:xfrm>
-            <a:off x="4754880" y="1645920"/>
-            <a:ext cx="1828800" cy="2286000"/>
-          </a:xfrm>
-          <a:prstGeom prst="roundRect">
-            <a:avLst/>
-          </a:prstGeom>
-          <a:solidFill>
-            <a:srgbClr val="F4E6C1"/>
-          </a:solidFill>
-          <a:ln/>
-        </p:spPr>
-      </p:sp>
-      <p:sp>
-        <p:nvSpPr>
-          <p:cNvPr id="10" name="Text 8"/>
-          <p:cNvSpPr txBox="1"/>
-          <p:nvPr/>
-        </p:nvSpPr>
-        <p:spPr>
-          <a:xfrm>
-            <a:off x="4754880" y="2194560"/>
-            <a:ext cx="1828800" cy="640080"/>
-          </a:xfrm>
-          <a:prstGeom prst="rect">
-            <a:avLst/>
-          </a:prstGeom>
-          <a:noFill/>
-          <a:ln/>
-        </p:spPr>
-        <p:txBody>
-          <a:bodyPr wrap="square" rtlCol="0" anchor="ctr"/>
-          <a:lstStyle/>
-          <a:p>
-            <a:pPr algn="ctr" indent="0" marL="0">
-              <a:buNone/>
-            </a:pPr>
-            <a:r>
-              <a:rPr lang="en-US" sz="4400" b="1" dirty="0">
-                <a:solidFill>
-                  <a:srgbClr val="7A1128"/>
-                </a:solidFill>
-                <a:latin typeface="Segoe UI" pitchFamily="34" charset="0"/>
-                <a:ea typeface="Segoe UI" pitchFamily="34" charset="-122"/>
-                <a:cs typeface="Segoe UI" pitchFamily="34" charset="-120"/>
-              </a:rPr>
-              <a:t>13</a:t>
-            </a:r>
-            <a:endParaRPr lang="en-US" sz="4400" dirty="0"/>
-          </a:p>
-        </p:txBody>
-      </p:sp>
-      <p:sp>
-        <p:nvSpPr>
-          <p:cNvPr id="11" name="Text 9"/>
-          <p:cNvSpPr txBox="1"/>
-          <p:nvPr/>
-        </p:nvSpPr>
-        <p:spPr>
-          <a:xfrm>
-            <a:off x="4754880" y="2926080"/>
-            <a:ext cx="1828800" cy="365760"/>
-          </a:xfrm>
-          <a:prstGeom prst="rect">
-            <a:avLst/>
-          </a:prstGeom>
-          <a:noFill/>
-          <a:ln/>
-        </p:spPr>
-        <p:txBody>
-          <a:bodyPr wrap="square" rtlCol="0" anchor="ctr"/>
-          <a:lstStyle/>
-          <a:p>
-            <a:pPr algn="ctr" indent="0" marL="0">
-              <a:buNone/>
-            </a:pPr>
-            <a:r>
-              <a:rPr lang="en-US" sz="1400" dirty="0">
-                <a:solidFill>
-                  <a:srgbClr val="7A1128"/>
-                </a:solidFill>
-                <a:latin typeface="Segoe UI" pitchFamily="34" charset="0"/>
-                <a:ea typeface="Segoe UI" pitchFamily="34" charset="-122"/>
-                <a:cs typeface="Segoe UI" pitchFamily="34" charset="-120"/>
-              </a:rPr>
-              <a:t>Bloques horarios</a:t>
-            </a:r>
-            <a:endParaRPr lang="en-US" sz="1400" dirty="0"/>
-          </a:p>
-        </p:txBody>
-      </p:sp>
-      <p:sp>
-        <p:nvSpPr>
-          <p:cNvPr id="12" name="Shape 10"/>
-          <p:cNvSpPr/>
-          <p:nvPr/>
-        </p:nvSpPr>
-        <p:spPr>
-          <a:xfrm>
-            <a:off x="6812280" y="1645920"/>
-            <a:ext cx="1828800" cy="2286000"/>
-          </a:xfrm>
-          <a:prstGeom prst="roundRect">
-            <a:avLst/>
-          </a:prstGeom>
-          <a:solidFill>
-            <a:srgbClr val="F4E6C1"/>
-          </a:solidFill>
-          <a:ln/>
-        </p:spPr>
-      </p:sp>
-      <p:sp>
-        <p:nvSpPr>
-          <p:cNvPr id="13" name="Text 11"/>
-          <p:cNvSpPr txBox="1"/>
-          <p:nvPr/>
-        </p:nvSpPr>
-        <p:spPr>
-          <a:xfrm>
-            <a:off x="6812280" y="2194560"/>
-            <a:ext cx="1828800" cy="640080"/>
-          </a:xfrm>
-          <a:prstGeom prst="rect">
-            <a:avLst/>
-          </a:prstGeom>
-          <a:noFill/>
-          <a:ln/>
-        </p:spPr>
-        <p:txBody>
-          <a:bodyPr wrap="square" rtlCol="0" anchor="ctr"/>
-          <a:lstStyle/>
-          <a:p>
-            <a:pPr algn="ctr" indent="0" marL="0">
-              <a:buNone/>
-            </a:pPr>
-            <a:r>
-              <a:rPr lang="en-US" sz="4400" b="1" dirty="0">
-                <a:solidFill>
-                  <a:srgbClr val="7A1128"/>
-                </a:solidFill>
-                <a:latin typeface="Segoe UI" pitchFamily="34" charset="0"/>
-                <a:ea typeface="Segoe UI" pitchFamily="34" charset="-122"/>
-                <a:cs typeface="Segoe UI" pitchFamily="34" charset="-120"/>
-              </a:rPr>
-              <a:t>100%</a:t>
-            </a:r>
-            <a:endParaRPr lang="en-US" sz="4400" dirty="0"/>
-          </a:p>
-        </p:txBody>
-      </p:sp>
-      <p:sp>
-        <p:nvSpPr>
-          <p:cNvPr id="14" name="Text 12"/>
-          <p:cNvSpPr txBox="1"/>
-          <p:nvPr/>
-        </p:nvSpPr>
-        <p:spPr>
-          <a:xfrm>
-            <a:off x="6812280" y="2926080"/>
-            <a:ext cx="1828800" cy="365760"/>
-          </a:xfrm>
-          <a:prstGeom prst="rect">
-            <a:avLst/>
-          </a:prstGeom>
-          <a:noFill/>
-          <a:ln/>
-        </p:spPr>
-        <p:txBody>
-          <a:bodyPr wrap="square" rtlCol="0" anchor="ctr"/>
-          <a:lstStyle/>
-          <a:p>
-            <a:pPr algn="ctr" indent="0" marL="0">
-              <a:buNone/>
-            </a:pPr>
-            <a:r>
-              <a:rPr lang="en-US" sz="1400" dirty="0">
-                <a:solidFill>
-                  <a:srgbClr val="7A1128"/>
-                </a:solidFill>
-                <a:latin typeface="Segoe UI" pitchFamily="34" charset="0"/>
-                <a:ea typeface="Segoe UI" pitchFamily="34" charset="-122"/>
-                <a:cs typeface="Segoe UI" pitchFamily="34" charset="-120"/>
-              </a:rPr>
-              <a:t>Responsive</a:t>
-            </a:r>
-            <a:endParaRPr lang="en-US" sz="1400" dirty="0"/>
-          </a:p>
-        </p:txBody>
-      </p:sp>
-    </p:spTree>
-  </p:cSld>
-  <p:clrMapOvr>
-    <a:masterClrMapping/>
-  </p:clrMapOvr>
-</p:sld>
-</file>
-
-<file path=ppt/slides/slide8.xml><?xml version="1.0" encoding="utf-8"?>
-<p:sld xmlns:a="http://schemas.openxmlformats.org/drawingml/2006/main" xmlns:r="http://schemas.openxmlformats.org/officeDocument/2006/relationships" xmlns:p="http://schemas.openxmlformats.org/presentationml/2006/main">
-  <p:cSld name="Slide 8">
-    <p:bg>
-      <p:bgPr>
-        <a:solidFill>
-          <a:srgbClr val="FFFFFF"/>
-        </a:solidFill>
-      </p:bgPr>
-    </p:bg>
-    <p:spTree>
-      <p:nvGrpSpPr>
-        <p:cNvPr id="1" name=""/>
-        <p:cNvGrpSpPr/>
-        <p:nvPr/>
-      </p:nvGrpSpPr>
-      <p:grpSpPr>
-        <a:xfrm>
-          <a:off x="0" y="0"/>
-          <a:ext cx="0" cy="0"/>
-          <a:chOff x="0" y="0"/>
-          <a:chExt cx="0" cy="0"/>
-        </a:xfrm>
-      </p:grpSpPr>
-      <p:sp>
-        <p:nvSpPr>
-          <p:cNvPr id="2" name="Text 0"/>
-          <p:cNvSpPr txBox="1"/>
-          <p:nvPr/>
-        </p:nvSpPr>
-        <p:spPr>
-          <a:xfrm>
             <a:off x="457200" y="365760"/>
             <a:ext cx="8229600" cy="457200"/>
           </a:xfrm>
@@ -4727,7 +3712,7 @@
           <a:bodyPr wrap="square" rtlCol="0" anchor="ctr"/>
           <a:lstStyle/>
           <a:p>
-            <a:pPr indent="0" marL="0">
+            <a:pPr marL="0" indent="0">
               <a:buNone/>
             </a:pPr>
             <a:r>
@@ -4786,7 +3771,7 @@
           <a:bodyPr wrap="square" rtlCol="0" anchor="ctr"/>
           <a:lstStyle/>
           <a:p>
-            <a:pPr algn="ctr" indent="0" marL="0">
+            <a:pPr marL="0" indent="0" algn="ctr">
               <a:buNone/>
             </a:pPr>
             <a:r>
@@ -4825,7 +3810,7 @@
           <a:bodyPr wrap="square" rtlCol="0" anchor="ctr"/>
           <a:lstStyle/>
           <a:p>
-            <a:pPr indent="0" marL="0">
+            <a:pPr marL="0" indent="0">
               <a:buNone/>
             </a:pPr>
             <a:r>
@@ -4864,7 +3849,7 @@
           <a:bodyPr wrap="square" rtlCol="0" anchor="ctr"/>
           <a:lstStyle/>
           <a:p>
-            <a:pPr indent="0" marL="0">
+            <a:pPr marL="0" indent="0">
               <a:buNone/>
             </a:pPr>
             <a:r>
@@ -4903,7 +3888,7 @@
           <a:bodyPr wrap="square" rtlCol="0" anchor="ctr"/>
           <a:lstStyle/>
           <a:p>
-            <a:pPr indent="0" marL="0">
+            <a:pPr marL="0" indent="0">
               <a:buNone/>
             </a:pPr>
             <a:r>
@@ -4942,7 +3927,7 @@
           <a:bodyPr wrap="square" rtlCol="0" anchor="ctr"/>
           <a:lstStyle/>
           <a:p>
-            <a:pPr indent="0" marL="0">
+            <a:pPr marL="0" indent="0">
               <a:buNone/>
             </a:pPr>
             <a:r>
@@ -4957,116 +3942,6 @@
               <a:t>• Utiliza tecnologías modernas y escalables</a:t>
             </a:r>
             <a:endParaRPr lang="en-US" sz="1300" dirty="0"/>
-          </a:p>
-        </p:txBody>
-      </p:sp>
-    </p:spTree>
-  </p:cSld>
-  <p:clrMapOvr>
-    <a:masterClrMapping/>
-  </p:clrMapOvr>
-</p:sld>
-</file>
-
-<file path=ppt/slides/slide9.xml><?xml version="1.0" encoding="utf-8"?>
-<p:sld xmlns:a="http://schemas.openxmlformats.org/drawingml/2006/main" xmlns:r="http://schemas.openxmlformats.org/officeDocument/2006/relationships" xmlns:p="http://schemas.openxmlformats.org/presentationml/2006/main">
-  <p:cSld name="Slide 9">
-    <p:bg>
-      <p:bgPr>
-        <a:solidFill>
-          <a:srgbClr val="7A1128"/>
-        </a:solidFill>
-      </p:bgPr>
-    </p:bg>
-    <p:spTree>
-      <p:nvGrpSpPr>
-        <p:cNvPr id="1" name=""/>
-        <p:cNvGrpSpPr/>
-        <p:nvPr/>
-      </p:nvGrpSpPr>
-      <p:grpSpPr>
-        <a:xfrm>
-          <a:off x="0" y="0"/>
-          <a:ext cx="0" cy="0"/>
-          <a:chOff x="0" y="0"/>
-          <a:chExt cx="0" cy="0"/>
-        </a:xfrm>
-      </p:grpSpPr>
-      <p:sp>
-        <p:nvSpPr>
-          <p:cNvPr id="2" name="Text 0"/>
-          <p:cNvSpPr txBox="1"/>
-          <p:nvPr/>
-        </p:nvSpPr>
-        <p:spPr>
-          <a:xfrm>
-            <a:off x="457200" y="1828800"/>
-            <a:ext cx="8229600" cy="731520"/>
-          </a:xfrm>
-          <a:prstGeom prst="rect">
-            <a:avLst/>
-          </a:prstGeom>
-          <a:noFill/>
-          <a:ln/>
-        </p:spPr>
-        <p:txBody>
-          <a:bodyPr wrap="square" rtlCol="0" anchor="ctr"/>
-          <a:lstStyle/>
-          <a:p>
-            <a:pPr algn="ctr" indent="0" marL="0">
-              <a:buNone/>
-            </a:pPr>
-            <a:r>
-              <a:rPr lang="en-US" sz="5600" b="1" dirty="0">
-                <a:solidFill>
-                  <a:srgbClr val="FFFFFF"/>
-                </a:solidFill>
-                <a:latin typeface="Segoe UI" pitchFamily="34" charset="0"/>
-                <a:ea typeface="Segoe UI" pitchFamily="34" charset="-122"/>
-                <a:cs typeface="Segoe UI" pitchFamily="34" charset="-120"/>
-              </a:rPr>
-              <a:t>¡Gracias!</a:t>
-            </a:r>
-            <a:endParaRPr lang="en-US" sz="5600" dirty="0"/>
-          </a:p>
-        </p:txBody>
-      </p:sp>
-      <p:sp>
-        <p:nvSpPr>
-          <p:cNvPr id="3" name="Text 1"/>
-          <p:cNvSpPr txBox="1"/>
-          <p:nvPr/>
-        </p:nvSpPr>
-        <p:spPr>
-          <a:xfrm>
-            <a:off x="457200" y="2926080"/>
-            <a:ext cx="8229600" cy="365760"/>
-          </a:xfrm>
-          <a:prstGeom prst="rect">
-            <a:avLst/>
-          </a:prstGeom>
-          <a:noFill/>
-          <a:ln/>
-        </p:spPr>
-        <p:txBody>
-          <a:bodyPr wrap="square" rtlCol="0" anchor="ctr"/>
-          <a:lstStyle/>
-          <a:p>
-            <a:pPr algn="ctr" indent="0" marL="0">
-              <a:buNone/>
-            </a:pPr>
-            <a:r>
-              <a:rPr lang="en-US" sz="1800" dirty="0">
-                <a:solidFill>
-                  <a:srgbClr val="F4E6C1"/>
-                </a:solidFill>
-                <a:latin typeface="Segoe UI" pitchFamily="34" charset="0"/>
-                <a:ea typeface="Segoe UI" pitchFamily="34" charset="-122"/>
-                <a:cs typeface="Segoe UI" pitchFamily="34" charset="-120"/>
-              </a:rPr>
-              <a:t>www.reservaunab.cl</a:t>
-            </a:r>
-            <a:endParaRPr lang="en-US" sz="1800" dirty="0"/>
           </a:p>
         </p:txBody>
       </p:sp>
@@ -5371,4 +4246,299 @@
     </a:ext>
   </a:extLst>
 </a:theme>
+</file>
+
+<file path=ppt/theme/theme2.xml><?xml version="1.0" encoding="utf-8"?>
+<a:theme xmlns:a="http://schemas.openxmlformats.org/drawingml/2006/main" name="Tema de Office">
+  <a:themeElements>
+    <a:clrScheme name="Office">
+      <a:dk1>
+        <a:sysClr val="windowText" lastClr="000000"/>
+      </a:dk1>
+      <a:lt1>
+        <a:sysClr val="window" lastClr="FFFFFF"/>
+      </a:lt1>
+      <a:dk2>
+        <a:srgbClr val="44546A"/>
+      </a:dk2>
+      <a:lt2>
+        <a:srgbClr val="E7E6E6"/>
+      </a:lt2>
+      <a:accent1>
+        <a:srgbClr val="4472C4"/>
+      </a:accent1>
+      <a:accent2>
+        <a:srgbClr val="ED7D31"/>
+      </a:accent2>
+      <a:accent3>
+        <a:srgbClr val="A5A5A5"/>
+      </a:accent3>
+      <a:accent4>
+        <a:srgbClr val="FFC000"/>
+      </a:accent4>
+      <a:accent5>
+        <a:srgbClr val="5B9BD5"/>
+      </a:accent5>
+      <a:accent6>
+        <a:srgbClr val="70AD47"/>
+      </a:accent6>
+      <a:hlink>
+        <a:srgbClr val="0563C1"/>
+      </a:hlink>
+      <a:folHlink>
+        <a:srgbClr val="954F72"/>
+      </a:folHlink>
+    </a:clrScheme>
+    <a:fontScheme name="Office">
+      <a:majorFont>
+        <a:latin typeface="Calibri Light" panose="020F0302020204030204"/>
+        <a:ea typeface=""/>
+        <a:cs typeface=""/>
+        <a:font script="Jpan" typeface="游ゴシック Light"/>
+        <a:font script="Hang" typeface="맑은 고딕"/>
+        <a:font script="Hans" typeface="等线 Light"/>
+        <a:font script="Hant" typeface="新細明體"/>
+        <a:font script="Arab" typeface="Times New Roman"/>
+        <a:font script="Hebr" typeface="Times New Roman"/>
+        <a:font script="Thai" typeface="Angsana New"/>
+        <a:font script="Ethi" typeface="Nyala"/>
+        <a:font script="Beng" typeface="Vrinda"/>
+        <a:font script="Gujr" typeface="Shruti"/>
+        <a:font script="Khmr" typeface="MoolBoran"/>
+        <a:font script="Knda" typeface="Tunga"/>
+        <a:font script="Guru" typeface="Raavi"/>
+        <a:font script="Cans" typeface="Euphemia"/>
+        <a:font script="Cher" typeface="Plantagenet Cherokee"/>
+        <a:font script="Yiii" typeface="Microsoft Yi Baiti"/>
+        <a:font script="Tibt" typeface="Microsoft Himalaya"/>
+        <a:font script="Thaa" typeface="MV Boli"/>
+        <a:font script="Deva" typeface="Mangal"/>
+        <a:font script="Telu" typeface="Gautami"/>
+        <a:font script="Taml" typeface="Latha"/>
+        <a:font script="Syrc" typeface="Estrangelo Edessa"/>
+        <a:font script="Orya" typeface="Kalinga"/>
+        <a:font script="Mlym" typeface="Kartika"/>
+        <a:font script="Laoo" typeface="DokChampa"/>
+        <a:font script="Sinh" typeface="Iskoola Pota"/>
+        <a:font script="Mong" typeface="Mongolian Baiti"/>
+        <a:font script="Viet" typeface="Times New Roman"/>
+        <a:font script="Uigh" typeface="Microsoft Uighur"/>
+        <a:font script="Geor" typeface="Sylfaen"/>
+        <a:font script="Armn" typeface="Arial"/>
+        <a:font script="Bugi" typeface="Leelawadee UI"/>
+        <a:font script="Bopo" typeface="Microsoft JhengHei"/>
+        <a:font script="Java" typeface="Javanese Text"/>
+        <a:font script="Lisu" typeface="Segoe UI"/>
+        <a:font script="Mymr" typeface="Myanmar Text"/>
+        <a:font script="Nkoo" typeface="Ebrima"/>
+        <a:font script="Olck" typeface="Nirmala UI"/>
+        <a:font script="Osma" typeface="Ebrima"/>
+        <a:font script="Phag" typeface="Phagspa"/>
+        <a:font script="Syrn" typeface="Estrangelo Edessa"/>
+        <a:font script="Syrj" typeface="Estrangelo Edessa"/>
+        <a:font script="Syre" typeface="Estrangelo Edessa"/>
+        <a:font script="Sora" typeface="Nirmala UI"/>
+        <a:font script="Tale" typeface="Microsoft Tai Le"/>
+        <a:font script="Talu" typeface="Microsoft New Tai Lue"/>
+        <a:font script="Tfng" typeface="Ebrima"/>
+      </a:majorFont>
+      <a:minorFont>
+        <a:latin typeface="Calibri" panose="020F0502020204030204"/>
+        <a:ea typeface=""/>
+        <a:cs typeface=""/>
+        <a:font script="Jpan" typeface="游ゴシック"/>
+        <a:font script="Hang" typeface="맑은 고딕"/>
+        <a:font script="Hans" typeface="等线"/>
+        <a:font script="Hant" typeface="新細明體"/>
+        <a:font script="Arab" typeface="Arial"/>
+        <a:font script="Hebr" typeface="Arial"/>
+        <a:font script="Thai" typeface="Cordia New"/>
+        <a:font script="Ethi" typeface="Nyala"/>
+        <a:font script="Beng" typeface="Vrinda"/>
+        <a:font script="Gujr" typeface="Shruti"/>
+        <a:font script="Khmr" typeface="DaunPenh"/>
+        <a:font script="Knda" typeface="Tunga"/>
+        <a:font script="Guru" typeface="Raavi"/>
+        <a:font script="Cans" typeface="Euphemia"/>
+        <a:font script="Cher" typeface="Plantagenet Cherokee"/>
+        <a:font script="Yiii" typeface="Microsoft Yi Baiti"/>
+        <a:font script="Tibt" typeface="Microsoft Himalaya"/>
+        <a:font script="Thaa" typeface="MV Boli"/>
+        <a:font script="Deva" typeface="Mangal"/>
+        <a:font script="Telu" typeface="Gautami"/>
+        <a:font script="Taml" typeface="Latha"/>
+        <a:font script="Syrc" typeface="Estrangelo Edessa"/>
+        <a:font script="Orya" typeface="Kalinga"/>
+        <a:font script="Mlym" typeface="Kartika"/>
+        <a:font script="Laoo" typeface="DokChampa"/>
+        <a:font script="Sinh" typeface="Iskoola Pota"/>
+        <a:font script="Mong" typeface="Mongolian Baiti"/>
+        <a:font script="Viet" typeface="Arial"/>
+        <a:font script="Uigh" typeface="Microsoft Uighur"/>
+        <a:font script="Geor" typeface="Sylfaen"/>
+        <a:font script="Armn" typeface="Arial"/>
+        <a:font script="Bugi" typeface="Leelawadee UI"/>
+        <a:font script="Bopo" typeface="Microsoft JhengHei"/>
+        <a:font script="Java" typeface="Javanese Text"/>
+        <a:font script="Lisu" typeface="Segoe UI"/>
+        <a:font script="Mymr" typeface="Myanmar Text"/>
+        <a:font script="Nkoo" typeface="Ebrima"/>
+        <a:font script="Olck" typeface="Nirmala UI"/>
+        <a:font script="Osma" typeface="Ebrima"/>
+        <a:font script="Phag" typeface="Phagspa"/>
+        <a:font script="Syrn" typeface="Estrangelo Edessa"/>
+        <a:font script="Syrj" typeface="Estrangelo Edessa"/>
+        <a:font script="Syre" typeface="Estrangelo Edessa"/>
+        <a:font script="Sora" typeface="Nirmala UI"/>
+        <a:font script="Tale" typeface="Microsoft Tai Le"/>
+        <a:font script="Talu" typeface="Microsoft New Tai Lue"/>
+        <a:font script="Tfng" typeface="Ebrima"/>
+      </a:minorFont>
+    </a:fontScheme>
+    <a:fmtScheme name="Office">
+      <a:fillStyleLst>
+        <a:solidFill>
+          <a:schemeClr val="phClr"/>
+        </a:solidFill>
+        <a:gradFill rotWithShape="1">
+          <a:gsLst>
+            <a:gs pos="0">
+              <a:schemeClr val="phClr">
+                <a:lumMod val="110000"/>
+                <a:satMod val="105000"/>
+                <a:tint val="67000"/>
+              </a:schemeClr>
+            </a:gs>
+            <a:gs pos="50000">
+              <a:schemeClr val="phClr">
+                <a:lumMod val="105000"/>
+                <a:satMod val="103000"/>
+                <a:tint val="73000"/>
+              </a:schemeClr>
+            </a:gs>
+            <a:gs pos="100000">
+              <a:schemeClr val="phClr">
+                <a:lumMod val="105000"/>
+                <a:satMod val="109000"/>
+                <a:tint val="81000"/>
+              </a:schemeClr>
+            </a:gs>
+          </a:gsLst>
+          <a:lin ang="5400000" scaled="0"/>
+        </a:gradFill>
+        <a:gradFill rotWithShape="1">
+          <a:gsLst>
+            <a:gs pos="0">
+              <a:schemeClr val="phClr">
+                <a:satMod val="103000"/>
+                <a:lumMod val="102000"/>
+                <a:tint val="94000"/>
+              </a:schemeClr>
+            </a:gs>
+            <a:gs pos="50000">
+              <a:schemeClr val="phClr">
+                <a:satMod val="110000"/>
+                <a:lumMod val="100000"/>
+                <a:shade val="100000"/>
+              </a:schemeClr>
+            </a:gs>
+            <a:gs pos="100000">
+              <a:schemeClr val="phClr">
+                <a:lumMod val="99000"/>
+                <a:satMod val="120000"/>
+                <a:shade val="78000"/>
+              </a:schemeClr>
+            </a:gs>
+          </a:gsLst>
+          <a:lin ang="5400000" scaled="0"/>
+        </a:gradFill>
+      </a:fillStyleLst>
+      <a:lnStyleLst>
+        <a:ln w="6350" cap="flat" cmpd="sng" algn="ctr">
+          <a:solidFill>
+            <a:schemeClr val="phClr"/>
+          </a:solidFill>
+          <a:prstDash val="solid"/>
+          <a:miter lim="800000"/>
+        </a:ln>
+        <a:ln w="12700" cap="flat" cmpd="sng" algn="ctr">
+          <a:solidFill>
+            <a:schemeClr val="phClr"/>
+          </a:solidFill>
+          <a:prstDash val="solid"/>
+          <a:miter lim="800000"/>
+        </a:ln>
+        <a:ln w="19050" cap="flat" cmpd="sng" algn="ctr">
+          <a:solidFill>
+            <a:schemeClr val="phClr"/>
+          </a:solidFill>
+          <a:prstDash val="solid"/>
+          <a:miter lim="800000"/>
+        </a:ln>
+      </a:lnStyleLst>
+      <a:effectStyleLst>
+        <a:effectStyle>
+          <a:effectLst/>
+        </a:effectStyle>
+        <a:effectStyle>
+          <a:effectLst/>
+        </a:effectStyle>
+        <a:effectStyle>
+          <a:effectLst>
+            <a:outerShdw blurRad="57150" dist="19050" dir="5400000" algn="ctr" rotWithShape="0">
+              <a:srgbClr val="000000">
+                <a:alpha val="63000"/>
+              </a:srgbClr>
+            </a:outerShdw>
+          </a:effectLst>
+        </a:effectStyle>
+      </a:effectStyleLst>
+      <a:bgFillStyleLst>
+        <a:solidFill>
+          <a:schemeClr val="phClr"/>
+        </a:solidFill>
+        <a:solidFill>
+          <a:schemeClr val="phClr">
+            <a:tint val="95000"/>
+            <a:satMod val="170000"/>
+          </a:schemeClr>
+        </a:solidFill>
+        <a:gradFill rotWithShape="1">
+          <a:gsLst>
+            <a:gs pos="0">
+              <a:schemeClr val="phClr">
+                <a:tint val="93000"/>
+                <a:satMod val="150000"/>
+                <a:shade val="98000"/>
+                <a:lumMod val="102000"/>
+              </a:schemeClr>
+            </a:gs>
+            <a:gs pos="50000">
+              <a:schemeClr val="phClr">
+                <a:tint val="98000"/>
+                <a:satMod val="130000"/>
+                <a:shade val="90000"/>
+                <a:lumMod val="103000"/>
+              </a:schemeClr>
+            </a:gs>
+            <a:gs pos="100000">
+              <a:schemeClr val="phClr">
+                <a:shade val="63000"/>
+                <a:satMod val="120000"/>
+              </a:schemeClr>
+            </a:gs>
+          </a:gsLst>
+          <a:lin ang="5400000" scaled="0"/>
+        </a:gradFill>
+      </a:bgFillStyleLst>
+    </a:fmtScheme>
+  </a:themeElements>
+  <a:objectDefaults/>
+  <a:extraClrSchemeLst/>
+  <a:extLst>
+    <a:ext uri="{05A4C25C-085E-4340-85A3-A5531E510DB2}">
+      <thm15:themeFamily xmlns:thm15="http://schemas.microsoft.com/office/thememl/2012/main" name="Office Theme" id="{62F939B6-93AF-4DB8-9C6B-D6C7DFDC589F}" vid="{4A3C46E8-61CC-4603-A589-7422A47A8E4A}"/>
+    </a:ext>
+  </a:extLst>
+</a:theme>
 </file>